--- a/vitality/codeox-kickoff-vitality-2026.pptx
+++ b/vitality/codeox-kickoff-vitality-2026.pptx
@@ -30479,13 +30479,13 @@
         <p:spPr>
           <a:xfrm>
             <a:off x="0" y="0"/>
-            <a:ext cx="12188952" cy="530352"/>
-          </a:xfrm>
-          <a:prstGeom prst="rect">
-            <a:avLst/>
-          </a:prstGeom>
-          <a:solidFill>
-            <a:srgbClr val="FFFFFF"/>
+            <a:ext cx="3337560" cy="6858000"/>
+          </a:xfrm>
+          <a:prstGeom prst="rect">
+            <a:avLst/>
+          </a:prstGeom>
+          <a:solidFill>
+            <a:srgbClr val="0C2340"/>
           </a:solidFill>
           <a:ln>
             <a:noFill/>
@@ -30521,6 +30521,600 @@
         </p:nvSpPr>
         <p:spPr>
           <a:xfrm>
+            <a:off x="1645920" y="4114800"/>
+            <a:ext cx="2194560" cy="3200400"/>
+          </a:xfrm>
+          <a:prstGeom prst="rect">
+            <a:avLst/>
+          </a:prstGeom>
+          <a:solidFill>
+            <a:srgbClr val="102C50"/>
+          </a:solidFill>
+          <a:ln>
+            <a:noFill/>
+          </a:ln>
+        </p:spPr>
+        <p:style>
+          <a:lnRef idx="1">
+            <a:schemeClr val="accent1"/>
+          </a:lnRef>
+          <a:fillRef idx="3">
+            <a:schemeClr val="accent1"/>
+          </a:fillRef>
+          <a:effectRef idx="2">
+            <a:schemeClr val="accent1"/>
+          </a:effectRef>
+          <a:fontRef idx="minor">
+            <a:schemeClr val="lt1"/>
+          </a:fontRef>
+        </p:style>
+        <p:txBody>
+          <a:bodyPr rtlCol="0" anchor="ctr"/>
+          <a:lstStyle/>
+          <a:p>
+            <a:pPr algn="ctr"/>
+          </a:p>
+        </p:txBody>
+      </p:sp>
+      <p:sp>
+        <p:nvSpPr>
+          <p:cNvPr id="4" name="Rectangle 3"/>
+          <p:cNvSpPr/>
+          <p:nvPr/>
+        </p:nvSpPr>
+        <p:spPr>
+          <a:xfrm>
+            <a:off x="347472" y="685800"/>
+            <a:ext cx="1170432" cy="237744"/>
+          </a:xfrm>
+          <a:prstGeom prst="rect">
+            <a:avLst/>
+          </a:prstGeom>
+          <a:solidFill>
+            <a:srgbClr val="0A3860"/>
+          </a:solidFill>
+          <a:ln w="7620">
+            <a:solidFill>
+              <a:srgbClr val="0A8FAE"/>
+            </a:solidFill>
+          </a:ln>
+        </p:spPr>
+        <p:style>
+          <a:lnRef idx="1">
+            <a:schemeClr val="accent1"/>
+          </a:lnRef>
+          <a:fillRef idx="3">
+            <a:schemeClr val="accent1"/>
+          </a:fillRef>
+          <a:effectRef idx="2">
+            <a:schemeClr val="accent1"/>
+          </a:effectRef>
+          <a:fontRef idx="minor">
+            <a:schemeClr val="lt1"/>
+          </a:fontRef>
+        </p:style>
+        <p:txBody>
+          <a:bodyPr rtlCol="0" anchor="ctr"/>
+          <a:lstStyle/>
+          <a:p>
+            <a:pPr algn="ctr"/>
+          </a:p>
+        </p:txBody>
+      </p:sp>
+      <p:sp>
+        <p:nvSpPr>
+          <p:cNvPr id="5" name="TextBox 4"/>
+          <p:cNvSpPr txBox="1"/>
+          <p:nvPr/>
+        </p:nvSpPr>
+        <p:spPr>
+          <a:xfrm>
+            <a:off x="347472" y="685800"/>
+            <a:ext cx="1170432" cy="237744"/>
+          </a:xfrm>
+          <a:prstGeom prst="rect">
+            <a:avLst/>
+          </a:prstGeom>
+          <a:noFill/>
+        </p:spPr>
+        <p:txBody>
+          <a:bodyPr wrap="square">
+            <a:spAutoFit/>
+          </a:bodyPr>
+          <a:lstStyle/>
+          <a:p>
+            <a:pPr algn="ctr"/>
+            <a:r>
+              <a:rPr sz="850" b="1">
+                <a:solidFill>
+                  <a:srgbClr val="0A8FAE"/>
+                </a:solidFill>
+                <a:latin typeface="Calibri"/>
+              </a:rPr>
+              <a:t>MODULE 02</a:t>
+            </a:r>
+          </a:p>
+        </p:txBody>
+      </p:sp>
+      <p:sp>
+        <p:nvSpPr>
+          <p:cNvPr id="6" name="TextBox 5"/>
+          <p:cNvSpPr txBox="1"/>
+          <p:nvPr/>
+        </p:nvSpPr>
+        <p:spPr>
+          <a:xfrm>
+            <a:off x="347472" y="1024128"/>
+            <a:ext cx="2834640" cy="804672"/>
+          </a:xfrm>
+          <a:prstGeom prst="rect">
+            <a:avLst/>
+          </a:prstGeom>
+          <a:noFill/>
+        </p:spPr>
+        <p:txBody>
+          <a:bodyPr wrap="square">
+            <a:spAutoFit/>
+          </a:bodyPr>
+          <a:lstStyle/>
+          <a:p>
+            <a:pPr algn="l"/>
+            <a:r>
+              <a:rPr sz="4600" b="1">
+                <a:solidFill>
+                  <a:srgbClr val="FFFFFF"/>
+                </a:solidFill>
+                <a:latin typeface="Georgia"/>
+              </a:rPr>
+              <a:t>AIKA</a:t>
+            </a:r>
+          </a:p>
+        </p:txBody>
+      </p:sp>
+      <p:sp>
+        <p:nvSpPr>
+          <p:cNvPr id="7" name="TextBox 6"/>
+          <p:cNvSpPr txBox="1"/>
+          <p:nvPr/>
+        </p:nvSpPr>
+        <p:spPr>
+          <a:xfrm>
+            <a:off x="347472" y="1847088"/>
+            <a:ext cx="2834640" cy="384048"/>
+          </a:xfrm>
+          <a:prstGeom prst="rect">
+            <a:avLst/>
+          </a:prstGeom>
+          <a:noFill/>
+        </p:spPr>
+        <p:txBody>
+          <a:bodyPr wrap="square">
+            <a:spAutoFit/>
+          </a:bodyPr>
+          <a:lstStyle/>
+          <a:p>
+            <a:pPr algn="l"/>
+            <a:r>
+              <a:rPr sz="1600" b="0">
+                <a:solidFill>
+                  <a:srgbClr val="9ABCD8"/>
+                </a:solidFill>
+                <a:latin typeface="Georgia"/>
+              </a:rPr>
+              <a:t>Voice AI Receptionist</a:t>
+            </a:r>
+          </a:p>
+        </p:txBody>
+      </p:sp>
+      <p:sp>
+        <p:nvSpPr>
+          <p:cNvPr id="8" name="TextBox 7"/>
+          <p:cNvSpPr txBox="1"/>
+          <p:nvPr/>
+        </p:nvSpPr>
+        <p:spPr>
+          <a:xfrm>
+            <a:off x="347472" y="2331720"/>
+            <a:ext cx="2834640" cy="749808"/>
+          </a:xfrm>
+          <a:prstGeom prst="rect">
+            <a:avLst/>
+          </a:prstGeom>
+          <a:noFill/>
+        </p:spPr>
+        <p:txBody>
+          <a:bodyPr wrap="square">
+            <a:spAutoFit/>
+          </a:bodyPr>
+          <a:lstStyle/>
+          <a:p>
+            <a:pPr algn="l"/>
+            <a:r>
+              <a:rPr sz="1000" b="0">
+                <a:solidFill>
+                  <a:srgbClr val="7296B8"/>
+                </a:solidFill>
+                <a:latin typeface="Calibri"/>
+              </a:rPr>
+              <a:t>24/7 Arabic + English inbound voice automation — from initial patient call through appointment confirmation and therapist coordination.</a:t>
+            </a:r>
+          </a:p>
+        </p:txBody>
+      </p:sp>
+      <p:sp>
+        <p:nvSpPr>
+          <p:cNvPr id="9" name="Rectangle 8"/>
+          <p:cNvSpPr/>
+          <p:nvPr/>
+        </p:nvSpPr>
+        <p:spPr>
+          <a:xfrm>
+            <a:off x="347472" y="3246120"/>
+            <a:ext cx="2651760" cy="10160"/>
+          </a:xfrm>
+          <a:prstGeom prst="rect">
+            <a:avLst/>
+          </a:prstGeom>
+          <a:solidFill>
+            <a:srgbClr val="1A406A"/>
+          </a:solidFill>
+          <a:ln>
+            <a:noFill/>
+          </a:ln>
+        </p:spPr>
+        <p:style>
+          <a:lnRef idx="1">
+            <a:schemeClr val="accent1"/>
+          </a:lnRef>
+          <a:fillRef idx="3">
+            <a:schemeClr val="accent1"/>
+          </a:fillRef>
+          <a:effectRef idx="2">
+            <a:schemeClr val="accent1"/>
+          </a:effectRef>
+          <a:fontRef idx="minor">
+            <a:schemeClr val="lt1"/>
+          </a:fontRef>
+        </p:style>
+        <p:txBody>
+          <a:bodyPr rtlCol="0" anchor="ctr"/>
+          <a:lstStyle/>
+          <a:p>
+            <a:pPr algn="ctr"/>
+          </a:p>
+        </p:txBody>
+      </p:sp>
+      <p:sp>
+        <p:nvSpPr>
+          <p:cNvPr id="10" name="TextBox 9"/>
+          <p:cNvSpPr txBox="1"/>
+          <p:nvPr/>
+        </p:nvSpPr>
+        <p:spPr>
+          <a:xfrm>
+            <a:off x="347472" y="3401568"/>
+            <a:ext cx="1417320" cy="201168"/>
+          </a:xfrm>
+          <a:prstGeom prst="rect">
+            <a:avLst/>
+          </a:prstGeom>
+          <a:noFill/>
+        </p:spPr>
+        <p:txBody>
+          <a:bodyPr wrap="square">
+            <a:spAutoFit/>
+          </a:bodyPr>
+          <a:lstStyle/>
+          <a:p>
+            <a:pPr algn="l"/>
+            <a:r>
+              <a:rPr sz="750" b="1">
+                <a:solidFill>
+                  <a:srgbClr val="0A8FAE"/>
+                </a:solidFill>
+                <a:latin typeface="Calibri"/>
+              </a:rPr>
+              <a:t>AVAILABILITY</a:t>
+            </a:r>
+          </a:p>
+        </p:txBody>
+      </p:sp>
+      <p:sp>
+        <p:nvSpPr>
+          <p:cNvPr id="11" name="TextBox 10"/>
+          <p:cNvSpPr txBox="1"/>
+          <p:nvPr/>
+        </p:nvSpPr>
+        <p:spPr>
+          <a:xfrm>
+            <a:off x="347472" y="3621024"/>
+            <a:ext cx="1417320" cy="548640"/>
+          </a:xfrm>
+          <a:prstGeom prst="rect">
+            <a:avLst/>
+          </a:prstGeom>
+          <a:noFill/>
+        </p:spPr>
+        <p:txBody>
+          <a:bodyPr wrap="square">
+            <a:spAutoFit/>
+          </a:bodyPr>
+          <a:lstStyle/>
+          <a:p>
+            <a:pPr algn="l"/>
+            <a:r>
+              <a:rPr sz="950" b="0">
+                <a:solidFill>
+                  <a:srgbClr val="FFFFFF"/>
+                </a:solidFill>
+                <a:latin typeface="Calibri"/>
+              </a:rPr>
+              <a:t>24/7 Inbound Reception</a:t>
+            </a:r>
+          </a:p>
+        </p:txBody>
+      </p:sp>
+      <p:sp>
+        <p:nvSpPr>
+          <p:cNvPr id="12" name="TextBox 11"/>
+          <p:cNvSpPr txBox="1"/>
+          <p:nvPr/>
+        </p:nvSpPr>
+        <p:spPr>
+          <a:xfrm>
+            <a:off x="1874520" y="3401568"/>
+            <a:ext cx="1417320" cy="201168"/>
+          </a:xfrm>
+          <a:prstGeom prst="rect">
+            <a:avLst/>
+          </a:prstGeom>
+          <a:noFill/>
+        </p:spPr>
+        <p:txBody>
+          <a:bodyPr wrap="square">
+            <a:spAutoFit/>
+          </a:bodyPr>
+          <a:lstStyle/>
+          <a:p>
+            <a:pPr algn="l"/>
+            <a:r>
+              <a:rPr sz="750" b="1">
+                <a:solidFill>
+                  <a:srgbClr val="0A8FAE"/>
+                </a:solidFill>
+                <a:latin typeface="Calibri"/>
+              </a:rPr>
+              <a:t>LANGUAGES</a:t>
+            </a:r>
+          </a:p>
+        </p:txBody>
+      </p:sp>
+      <p:sp>
+        <p:nvSpPr>
+          <p:cNvPr id="13" name="TextBox 12"/>
+          <p:cNvSpPr txBox="1"/>
+          <p:nvPr/>
+        </p:nvSpPr>
+        <p:spPr>
+          <a:xfrm>
+            <a:off x="1874520" y="3621024"/>
+            <a:ext cx="1417320" cy="548640"/>
+          </a:xfrm>
+          <a:prstGeom prst="rect">
+            <a:avLst/>
+          </a:prstGeom>
+          <a:noFill/>
+        </p:spPr>
+        <p:txBody>
+          <a:bodyPr wrap="square">
+            <a:spAutoFit/>
+          </a:bodyPr>
+          <a:lstStyle/>
+          <a:p>
+            <a:pPr algn="l"/>
+            <a:r>
+              <a:rPr sz="950" b="0">
+                <a:solidFill>
+                  <a:srgbClr val="FFFFFF"/>
+                </a:solidFill>
+                <a:latin typeface="Calibri"/>
+              </a:rPr>
+              <a:t>Arabic (Najdi) + English</a:t>
+            </a:r>
+          </a:p>
+        </p:txBody>
+      </p:sp>
+      <p:sp>
+        <p:nvSpPr>
+          <p:cNvPr id="14" name="TextBox 13"/>
+          <p:cNvSpPr txBox="1"/>
+          <p:nvPr/>
+        </p:nvSpPr>
+        <p:spPr>
+          <a:xfrm>
+            <a:off x="347472" y="4480560"/>
+            <a:ext cx="1417320" cy="201168"/>
+          </a:xfrm>
+          <a:prstGeom prst="rect">
+            <a:avLst/>
+          </a:prstGeom>
+          <a:noFill/>
+        </p:spPr>
+        <p:txBody>
+          <a:bodyPr wrap="square">
+            <a:spAutoFit/>
+          </a:bodyPr>
+          <a:lstStyle/>
+          <a:p>
+            <a:pPr algn="l"/>
+            <a:r>
+              <a:rPr sz="750" b="1">
+                <a:solidFill>
+                  <a:srgbClr val="0A8FAE"/>
+                </a:solidFill>
+                <a:latin typeface="Calibri"/>
+              </a:rPr>
+              <a:t>COVERAGE</a:t>
+            </a:r>
+          </a:p>
+        </p:txBody>
+      </p:sp>
+      <p:sp>
+        <p:nvSpPr>
+          <p:cNvPr id="15" name="TextBox 14"/>
+          <p:cNvSpPr txBox="1"/>
+          <p:nvPr/>
+        </p:nvSpPr>
+        <p:spPr>
+          <a:xfrm>
+            <a:off x="347472" y="4700016"/>
+            <a:ext cx="1417320" cy="548640"/>
+          </a:xfrm>
+          <a:prstGeom prst="rect">
+            <a:avLst/>
+          </a:prstGeom>
+          <a:noFill/>
+        </p:spPr>
+        <p:txBody>
+          <a:bodyPr wrap="square">
+            <a:spAutoFit/>
+          </a:bodyPr>
+          <a:lstStyle/>
+          <a:p>
+            <a:pPr algn="l"/>
+            <a:r>
+              <a:rPr sz="950" b="0">
+                <a:solidFill>
+                  <a:srgbClr val="FFFFFF"/>
+                </a:solidFill>
+                <a:latin typeface="Calibri"/>
+              </a:rPr>
+              <a:t>Voice Booking · Reminders · Therapist Coordination</a:t>
+            </a:r>
+          </a:p>
+        </p:txBody>
+      </p:sp>
+      <p:sp>
+        <p:nvSpPr>
+          <p:cNvPr id="16" name="TextBox 15"/>
+          <p:cNvSpPr txBox="1"/>
+          <p:nvPr/>
+        </p:nvSpPr>
+        <p:spPr>
+          <a:xfrm>
+            <a:off x="1874520" y="4480560"/>
+            <a:ext cx="1417320" cy="201168"/>
+          </a:xfrm>
+          <a:prstGeom prst="rect">
+            <a:avLst/>
+          </a:prstGeom>
+          <a:noFill/>
+        </p:spPr>
+        <p:txBody>
+          <a:bodyPr wrap="square">
+            <a:spAutoFit/>
+          </a:bodyPr>
+          <a:lstStyle/>
+          <a:p>
+            <a:pPr algn="l"/>
+            <a:r>
+              <a:rPr sz="750" b="1">
+                <a:solidFill>
+                  <a:srgbClr val="0A8FAE"/>
+                </a:solidFill>
+                <a:latin typeface="Calibri"/>
+              </a:rPr>
+              <a:t>VOICE CAPACITY</a:t>
+            </a:r>
+          </a:p>
+        </p:txBody>
+      </p:sp>
+      <p:sp>
+        <p:nvSpPr>
+          <p:cNvPr id="17" name="TextBox 16"/>
+          <p:cNvSpPr txBox="1"/>
+          <p:nvPr/>
+        </p:nvSpPr>
+        <p:spPr>
+          <a:xfrm>
+            <a:off x="1874520" y="4700016"/>
+            <a:ext cx="1417320" cy="548640"/>
+          </a:xfrm>
+          <a:prstGeom prst="rect">
+            <a:avLst/>
+          </a:prstGeom>
+          <a:noFill/>
+        </p:spPr>
+        <p:txBody>
+          <a:bodyPr wrap="square">
+            <a:spAutoFit/>
+          </a:bodyPr>
+          <a:lstStyle/>
+          <a:p>
+            <a:pPr algn="l"/>
+            <a:r>
+              <a:rPr sz="950" b="0">
+                <a:solidFill>
+                  <a:srgbClr val="FFFFFF"/>
+                </a:solidFill>
+                <a:latin typeface="Calibri"/>
+              </a:rPr>
+              <a:t>15,000 Minutes / Year Included</a:t>
+            </a:r>
+          </a:p>
+        </p:txBody>
+      </p:sp>
+      <p:sp>
+        <p:nvSpPr>
+          <p:cNvPr id="18" name="Rectangle 17"/>
+          <p:cNvSpPr/>
+          <p:nvPr/>
+        </p:nvSpPr>
+        <p:spPr>
+          <a:xfrm>
+            <a:off x="0" y="0"/>
+            <a:ext cx="12188952" cy="530352"/>
+          </a:xfrm>
+          <a:prstGeom prst="rect">
+            <a:avLst/>
+          </a:prstGeom>
+          <a:solidFill>
+            <a:srgbClr val="FFFFFF"/>
+          </a:solidFill>
+          <a:ln>
+            <a:noFill/>
+          </a:ln>
+        </p:spPr>
+        <p:style>
+          <a:lnRef idx="1">
+            <a:schemeClr val="accent1"/>
+          </a:lnRef>
+          <a:fillRef idx="3">
+            <a:schemeClr val="accent1"/>
+          </a:fillRef>
+          <a:effectRef idx="2">
+            <a:schemeClr val="accent1"/>
+          </a:effectRef>
+          <a:fontRef idx="minor">
+            <a:schemeClr val="lt1"/>
+          </a:fontRef>
+        </p:style>
+        <p:txBody>
+          <a:bodyPr rtlCol="0" anchor="ctr"/>
+          <a:lstStyle/>
+          <a:p>
+            <a:pPr algn="ctr"/>
+          </a:p>
+        </p:txBody>
+      </p:sp>
+      <p:sp>
+        <p:nvSpPr>
+          <p:cNvPr id="19" name="Rectangle 18"/>
+          <p:cNvSpPr/>
+          <p:nvPr/>
+        </p:nvSpPr>
+        <p:spPr>
+          <a:xfrm>
             <a:off x="0" y="517652"/>
             <a:ext cx="12188952" cy="15240"/>
           </a:xfrm>
@@ -30558,7 +31152,7 @@
       </p:sp>
       <p:sp>
         <p:nvSpPr>
-          <p:cNvPr id="4" name="Rectangle 3"/>
+          <p:cNvPr id="20" name="Rectangle 19"/>
           <p:cNvSpPr/>
           <p:nvPr/>
         </p:nvSpPr>
@@ -30601,14 +31195,14 @@
       </p:sp>
       <p:sp>
         <p:nvSpPr>
-          <p:cNvPr id="5" name="TextBox 4"/>
+          <p:cNvPr id="21" name="TextBox 20"/>
           <p:cNvSpPr txBox="1"/>
           <p:nvPr/>
         </p:nvSpPr>
         <p:spPr>
           <a:xfrm>
             <a:off x="182880" y="91440"/>
-            <a:ext cx="3657600" cy="347472"/>
+            <a:ext cx="3657600" cy="365760"/>
           </a:xfrm>
           <a:prstGeom prst="rect">
             <a:avLst/>
@@ -30636,7 +31230,7 @@
       </p:sp>
       <p:sp>
         <p:nvSpPr>
-          <p:cNvPr id="6" name="TextBox 5"/>
+          <p:cNvPr id="22" name="TextBox 21"/>
           <p:cNvSpPr txBox="1"/>
           <p:nvPr/>
         </p:nvSpPr>
@@ -30664,21 +31258,21 @@
                 </a:solidFill>
                 <a:latin typeface="Calibri"/>
               </a:rPr>
-              <a:t>AIKA — VOICE AI RECEPTIONIST</a:t>
-            </a:r>
-          </a:p>
-        </p:txBody>
-      </p:sp>
-      <p:sp>
-        <p:nvSpPr>
-          <p:cNvPr id="7" name="Rectangle 6"/>
-          <p:cNvSpPr/>
-          <p:nvPr/>
-        </p:nvSpPr>
-        <p:spPr>
-          <a:xfrm>
-            <a:off x="457200" y="685800"/>
-            <a:ext cx="45720" cy="182880"/>
+              <a:t>AIKA — Voice AI Receptionist</a:t>
+            </a:r>
+          </a:p>
+        </p:txBody>
+      </p:sp>
+      <p:sp>
+        <p:nvSpPr>
+          <p:cNvPr id="23" name="Rectangle 22"/>
+          <p:cNvSpPr/>
+          <p:nvPr/>
+        </p:nvSpPr>
+        <p:spPr>
+          <a:xfrm>
+            <a:off x="3547872" y="658368"/>
+            <a:ext cx="36576" cy="182880"/>
           </a:xfrm>
           <a:prstGeom prst="rect">
             <a:avLst/>
@@ -30714,14 +31308,14 @@
       </p:sp>
       <p:sp>
         <p:nvSpPr>
-          <p:cNvPr id="8" name="TextBox 7"/>
-          <p:cNvSpPr txBox="1"/>
-          <p:nvPr/>
-        </p:nvSpPr>
-        <p:spPr>
-          <a:xfrm>
-            <a:off x="594360" y="658368"/>
-            <a:ext cx="7315200" cy="228600"/>
+          <p:cNvPr id="24" name="TextBox 23"/>
+          <p:cNvSpPr txBox="1"/>
+          <p:nvPr/>
+        </p:nvSpPr>
+        <p:spPr>
+          <a:xfrm>
+            <a:off x="3639312" y="658368"/>
+            <a:ext cx="8439912" cy="182880"/>
           </a:xfrm>
           <a:prstGeom prst="rect">
             <a:avLst/>
@@ -30736,62 +31330,27 @@
           <a:p>
             <a:pPr algn="l"/>
             <a:r>
-              <a:rPr sz="850" b="1">
-                <a:solidFill>
-                  <a:srgbClr val="076E86"/>
-                </a:solidFill>
-                <a:latin typeface="Calibri"/>
-              </a:rPr>
-              <a:t>MODULE 02</a:t>
-            </a:r>
-          </a:p>
-        </p:txBody>
-      </p:sp>
-      <p:sp>
-        <p:nvSpPr>
-          <p:cNvPr id="9" name="TextBox 8"/>
-          <p:cNvSpPr txBox="1"/>
-          <p:nvPr/>
-        </p:nvSpPr>
-        <p:spPr>
-          <a:xfrm>
-            <a:off x="457200" y="932688"/>
-            <a:ext cx="11247120" cy="548640"/>
-          </a:xfrm>
-          <a:prstGeom prst="rect">
-            <a:avLst/>
-          </a:prstGeom>
-          <a:noFill/>
-        </p:spPr>
-        <p:txBody>
-          <a:bodyPr wrap="square">
-            <a:spAutoFit/>
-          </a:bodyPr>
-          <a:lstStyle/>
-          <a:p>
-            <a:pPr algn="l"/>
-            <a:r>
-              <a:rPr sz="2600" b="1">
-                <a:solidFill>
-                  <a:srgbClr val="0C2340"/>
-                </a:solidFill>
-                <a:latin typeface="Georgia"/>
-              </a:rPr>
-              <a:t>AIKA — Voice AI Receptionist</a:t>
-            </a:r>
-          </a:p>
-        </p:txBody>
-      </p:sp>
-      <p:sp>
-        <p:nvSpPr>
-          <p:cNvPr id="10" name="Rectangle 9"/>
-          <p:cNvSpPr/>
-          <p:nvPr/>
-        </p:nvSpPr>
-        <p:spPr>
-          <a:xfrm>
-            <a:off x="457200" y="1554480"/>
-            <a:ext cx="5532120" cy="804672"/>
+              <a:rPr sz="800" b="1">
+                <a:solidFill>
+                  <a:srgbClr val="5E7696"/>
+                </a:solidFill>
+                <a:latin typeface="Calibri"/>
+              </a:rPr>
+              <a:t>PRIMARY CAPABILITIES</a:t>
+            </a:r>
+          </a:p>
+        </p:txBody>
+      </p:sp>
+      <p:sp>
+        <p:nvSpPr>
+          <p:cNvPr id="25" name="Rectangle 24"/>
+          <p:cNvSpPr/>
+          <p:nvPr/>
+        </p:nvSpPr>
+        <p:spPr>
+          <a:xfrm>
+            <a:off x="3547872" y="896112"/>
+            <a:ext cx="2746248" cy="1874519"/>
           </a:xfrm>
           <a:prstGeom prst="rect">
             <a:avLst/>
@@ -30829,20 +31388,20 @@
       </p:sp>
       <p:sp>
         <p:nvSpPr>
-          <p:cNvPr id="11" name="Rectangle 10"/>
-          <p:cNvSpPr/>
-          <p:nvPr/>
-        </p:nvSpPr>
-        <p:spPr>
-          <a:xfrm>
-            <a:off x="457200" y="1554480"/>
-            <a:ext cx="64008" cy="804672"/>
-          </a:xfrm>
-          <a:prstGeom prst="rect">
-            <a:avLst/>
-          </a:prstGeom>
-          <a:solidFill>
-            <a:srgbClr val="0C2340"/>
+          <p:cNvPr id="26" name="Rectangle 25"/>
+          <p:cNvSpPr/>
+          <p:nvPr/>
+        </p:nvSpPr>
+        <p:spPr>
+          <a:xfrm>
+            <a:off x="3547872" y="896112"/>
+            <a:ext cx="64008" cy="1874519"/>
+          </a:xfrm>
+          <a:prstGeom prst="rect">
+            <a:avLst/>
+          </a:prstGeom>
+          <a:solidFill>
+            <a:srgbClr val="0A8FAE"/>
           </a:solidFill>
           <a:ln>
             <a:noFill/>
@@ -30872,14 +31431,14 @@
       </p:sp>
       <p:sp>
         <p:nvSpPr>
-          <p:cNvPr id="12" name="TextBox 11"/>
-          <p:cNvSpPr txBox="1"/>
-          <p:nvPr/>
-        </p:nvSpPr>
-        <p:spPr>
-          <a:xfrm>
-            <a:off x="640080" y="1627632"/>
-            <a:ext cx="5257800" cy="274320"/>
+          <p:cNvPr id="27" name="TextBox 26"/>
+          <p:cNvSpPr txBox="1"/>
+          <p:nvPr/>
+        </p:nvSpPr>
+        <p:spPr>
+          <a:xfrm>
+            <a:off x="3730752" y="1042416"/>
+            <a:ext cx="2508504" cy="384048"/>
           </a:xfrm>
           <a:prstGeom prst="rect">
             <a:avLst/>
@@ -30894,11 +31453,11 @@
           <a:p>
             <a:pPr algn="l"/>
             <a:r>
-              <a:rPr sz="1100" b="1">
+              <a:rPr sz="1400" b="1">
                 <a:solidFill>
                   <a:srgbClr val="0C2340"/>
                 </a:solidFill>
-                <a:latin typeface="Calibri"/>
+                <a:latin typeface="Georgia"/>
               </a:rPr>
               <a:t>24/7 Inbound Receptionist</a:t>
             </a:r>
@@ -30907,14 +31466,14 @@
       </p:sp>
       <p:sp>
         <p:nvSpPr>
-          <p:cNvPr id="13" name="TextBox 12"/>
-          <p:cNvSpPr txBox="1"/>
-          <p:nvPr/>
-        </p:nvSpPr>
-        <p:spPr>
-          <a:xfrm>
-            <a:off x="640080" y="1956816"/>
-            <a:ext cx="5257800" cy="310896"/>
+          <p:cNvPr id="28" name="TextBox 27"/>
+          <p:cNvSpPr txBox="1"/>
+          <p:nvPr/>
+        </p:nvSpPr>
+        <p:spPr>
+          <a:xfrm>
+            <a:off x="3730752" y="1517904"/>
+            <a:ext cx="2508504" cy="1005840"/>
           </a:xfrm>
           <a:prstGeom prst="rect">
             <a:avLst/>
@@ -30929,27 +31488,28 @@
           <a:p>
             <a:pPr algn="l"/>
             <a:r>
-              <a:rPr sz="1000" b="0">
+              <a:rPr sz="1100" b="0">
                 <a:solidFill>
                   <a:srgbClr val="283C56"/>
                 </a:solidFill>
                 <a:latin typeface="Calibri"/>
               </a:rPr>
-              <a:t>Answers every call in Najdi Arabic &amp; English. No more missed calls, ever.</a:t>
-            </a:r>
-          </a:p>
-        </p:txBody>
-      </p:sp>
-      <p:sp>
-        <p:nvSpPr>
-          <p:cNvPr id="14" name="Rectangle 13"/>
-          <p:cNvSpPr/>
-          <p:nvPr/>
-        </p:nvSpPr>
-        <p:spPr>
-          <a:xfrm>
-            <a:off x="6099048" y="1554480"/>
-            <a:ext cx="5532120" cy="804672"/>
+              <a:t>Answers every patient call in Najdi Arabic &amp; English.
+No missed after-hours calls — ever.</a:t>
+            </a:r>
+          </a:p>
+        </p:txBody>
+      </p:sp>
+      <p:sp>
+        <p:nvSpPr>
+          <p:cNvPr id="29" name="Rectangle 28"/>
+          <p:cNvSpPr/>
+          <p:nvPr/>
+        </p:nvSpPr>
+        <p:spPr>
+          <a:xfrm>
+            <a:off x="6394704" y="896112"/>
+            <a:ext cx="2746248" cy="1874519"/>
           </a:xfrm>
           <a:prstGeom prst="rect">
             <a:avLst/>
@@ -30987,14 +31547,14 @@
       </p:sp>
       <p:sp>
         <p:nvSpPr>
-          <p:cNvPr id="15" name="Rectangle 14"/>
-          <p:cNvSpPr/>
-          <p:nvPr/>
-        </p:nvSpPr>
-        <p:spPr>
-          <a:xfrm>
-            <a:off x="6099048" y="1554480"/>
-            <a:ext cx="64008" cy="804672"/>
+          <p:cNvPr id="30" name="Rectangle 29"/>
+          <p:cNvSpPr/>
+          <p:nvPr/>
+        </p:nvSpPr>
+        <p:spPr>
+          <a:xfrm>
+            <a:off x="6394704" y="896112"/>
+            <a:ext cx="64008" cy="1874519"/>
           </a:xfrm>
           <a:prstGeom prst="rect">
             <a:avLst/>
@@ -31030,14 +31590,14 @@
       </p:sp>
       <p:sp>
         <p:nvSpPr>
-          <p:cNvPr id="16" name="TextBox 15"/>
-          <p:cNvSpPr txBox="1"/>
-          <p:nvPr/>
-        </p:nvSpPr>
-        <p:spPr>
-          <a:xfrm>
-            <a:off x="6281928" y="1627632"/>
-            <a:ext cx="5257800" cy="274320"/>
+          <p:cNvPr id="31" name="TextBox 30"/>
+          <p:cNvSpPr txBox="1"/>
+          <p:nvPr/>
+        </p:nvSpPr>
+        <p:spPr>
+          <a:xfrm>
+            <a:off x="6577584" y="1042416"/>
+            <a:ext cx="2508504" cy="384048"/>
           </a:xfrm>
           <a:prstGeom prst="rect">
             <a:avLst/>
@@ -31052,11 +31612,11 @@
           <a:p>
             <a:pPr algn="l"/>
             <a:r>
-              <a:rPr sz="1100" b="1">
+              <a:rPr sz="1400" b="1">
                 <a:solidFill>
                   <a:srgbClr val="0C2340"/>
                 </a:solidFill>
-                <a:latin typeface="Calibri"/>
+                <a:latin typeface="Georgia"/>
               </a:rPr>
               <a:t>Voice Booking</a:t>
             </a:r>
@@ -31065,14 +31625,14 @@
       </p:sp>
       <p:sp>
         <p:nvSpPr>
-          <p:cNvPr id="17" name="TextBox 16"/>
-          <p:cNvSpPr txBox="1"/>
-          <p:nvPr/>
-        </p:nvSpPr>
-        <p:spPr>
-          <a:xfrm>
-            <a:off x="6281928" y="1956816"/>
-            <a:ext cx="5257800" cy="310896"/>
+          <p:cNvPr id="32" name="TextBox 31"/>
+          <p:cNvSpPr txBox="1"/>
+          <p:nvPr/>
+        </p:nvSpPr>
+        <p:spPr>
+          <a:xfrm>
+            <a:off x="6577584" y="1517904"/>
+            <a:ext cx="2508504" cy="1005840"/>
           </a:xfrm>
           <a:prstGeom prst="rect">
             <a:avLst/>
@@ -31087,27 +31647,28 @@
           <a:p>
             <a:pPr algn="l"/>
             <a:r>
-              <a:rPr sz="1000" b="0">
+              <a:rPr sz="1100" b="0">
                 <a:solidFill>
                   <a:srgbClr val="283C56"/>
                 </a:solidFill>
                 <a:latin typeface="Calibri"/>
               </a:rPr>
-              <a:t>Conversational booking over the phone — writes directly to Nixpend HMS.</a:t>
-            </a:r>
-          </a:p>
-        </p:txBody>
-      </p:sp>
-      <p:sp>
-        <p:nvSpPr>
-          <p:cNvPr id="18" name="Rectangle 17"/>
-          <p:cNvSpPr/>
-          <p:nvPr/>
-        </p:nvSpPr>
-        <p:spPr>
-          <a:xfrm>
-            <a:off x="457200" y="2450592"/>
-            <a:ext cx="5532120" cy="804672"/>
+              <a:t>Conversational appointment booking by phone.
+Writes directly into Nixpend HMS.</a:t>
+            </a:r>
+          </a:p>
+        </p:txBody>
+      </p:sp>
+      <p:sp>
+        <p:nvSpPr>
+          <p:cNvPr id="33" name="Rectangle 32"/>
+          <p:cNvSpPr/>
+          <p:nvPr/>
+        </p:nvSpPr>
+        <p:spPr>
+          <a:xfrm>
+            <a:off x="9241536" y="896112"/>
+            <a:ext cx="2746248" cy="1874519"/>
           </a:xfrm>
           <a:prstGeom prst="rect">
             <a:avLst/>
@@ -31145,20 +31706,20 @@
       </p:sp>
       <p:sp>
         <p:nvSpPr>
-          <p:cNvPr id="19" name="Rectangle 18"/>
-          <p:cNvSpPr/>
-          <p:nvPr/>
-        </p:nvSpPr>
-        <p:spPr>
-          <a:xfrm>
-            <a:off x="457200" y="2450592"/>
-            <a:ext cx="64008" cy="804672"/>
-          </a:xfrm>
-          <a:prstGeom prst="rect">
-            <a:avLst/>
-          </a:prstGeom>
-          <a:solidFill>
-            <a:srgbClr val="0C2340"/>
+          <p:cNvPr id="34" name="Rectangle 33"/>
+          <p:cNvSpPr/>
+          <p:nvPr/>
+        </p:nvSpPr>
+        <p:spPr>
+          <a:xfrm>
+            <a:off x="9241536" y="896112"/>
+            <a:ext cx="64008" cy="1874519"/>
+          </a:xfrm>
+          <a:prstGeom prst="rect">
+            <a:avLst/>
+          </a:prstGeom>
+          <a:solidFill>
+            <a:srgbClr val="177552"/>
           </a:solidFill>
           <a:ln>
             <a:noFill/>
@@ -31188,14 +31749,14 @@
       </p:sp>
       <p:sp>
         <p:nvSpPr>
-          <p:cNvPr id="20" name="TextBox 19"/>
-          <p:cNvSpPr txBox="1"/>
-          <p:nvPr/>
-        </p:nvSpPr>
-        <p:spPr>
-          <a:xfrm>
-            <a:off x="640080" y="2523744"/>
-            <a:ext cx="5257800" cy="274320"/>
+          <p:cNvPr id="35" name="TextBox 34"/>
+          <p:cNvSpPr txBox="1"/>
+          <p:nvPr/>
+        </p:nvSpPr>
+        <p:spPr>
+          <a:xfrm>
+            <a:off x="9424416" y="1042416"/>
+            <a:ext cx="2508504" cy="384048"/>
           </a:xfrm>
           <a:prstGeom prst="rect">
             <a:avLst/>
@@ -31210,27 +31771,27 @@
           <a:p>
             <a:pPr algn="l"/>
             <a:r>
-              <a:rPr sz="1100" b="1">
+              <a:rPr sz="1400" b="1">
                 <a:solidFill>
                   <a:srgbClr val="0C2340"/>
                 </a:solidFill>
-                <a:latin typeface="Calibri"/>
-              </a:rPr>
-              <a:t>Automated Patient Reminders</a:t>
-            </a:r>
-          </a:p>
-        </p:txBody>
-      </p:sp>
-      <p:sp>
-        <p:nvSpPr>
-          <p:cNvPr id="21" name="TextBox 20"/>
-          <p:cNvSpPr txBox="1"/>
-          <p:nvPr/>
-        </p:nvSpPr>
-        <p:spPr>
-          <a:xfrm>
-            <a:off x="640080" y="2852928"/>
-            <a:ext cx="5257800" cy="310896"/>
+                <a:latin typeface="Georgia"/>
+              </a:rPr>
+              <a:t>Therapist Confirmation</a:t>
+            </a:r>
+          </a:p>
+        </p:txBody>
+      </p:sp>
+      <p:sp>
+        <p:nvSpPr>
+          <p:cNvPr id="36" name="TextBox 35"/>
+          <p:cNvSpPr txBox="1"/>
+          <p:nvPr/>
+        </p:nvSpPr>
+        <p:spPr>
+          <a:xfrm>
+            <a:off x="9424416" y="1517904"/>
+            <a:ext cx="2508504" cy="1005840"/>
           </a:xfrm>
           <a:prstGeom prst="rect">
             <a:avLst/>
@@ -31245,27 +31806,105 @@
           <a:p>
             <a:pPr algn="l"/>
             <a:r>
-              <a:rPr sz="1000" b="0">
+              <a:rPr sz="1100" b="0">
                 <a:solidFill>
                   <a:srgbClr val="283C56"/>
                 </a:solidFill>
                 <a:latin typeface="Calibri"/>
               </a:rPr>
-              <a:t>Outbound reminder call 2 hours before every appointment. Reduces no-shows.</a:t>
-            </a:r>
-          </a:p>
-        </p:txBody>
-      </p:sp>
-      <p:sp>
-        <p:nvSpPr>
-          <p:cNvPr id="22" name="Rectangle 21"/>
-          <p:cNvSpPr/>
-          <p:nvPr/>
-        </p:nvSpPr>
-        <p:spPr>
-          <a:xfrm>
-            <a:off x="6099048" y="2450592"/>
-            <a:ext cx="5532120" cy="804672"/>
+              <a:t>Automatic outbound call to therapist after every new booking. Language auto-detected (Arabic / English).</a:t>
+            </a:r>
+          </a:p>
+        </p:txBody>
+      </p:sp>
+      <p:sp>
+        <p:nvSpPr>
+          <p:cNvPr id="37" name="Rectangle 36"/>
+          <p:cNvSpPr/>
+          <p:nvPr/>
+        </p:nvSpPr>
+        <p:spPr>
+          <a:xfrm>
+            <a:off x="3547872" y="2880359"/>
+            <a:ext cx="36576" cy="182880"/>
+          </a:xfrm>
+          <a:prstGeom prst="rect">
+            <a:avLst/>
+          </a:prstGeom>
+          <a:solidFill>
+            <a:srgbClr val="0A8FAE"/>
+          </a:solidFill>
+          <a:ln>
+            <a:noFill/>
+          </a:ln>
+        </p:spPr>
+        <p:style>
+          <a:lnRef idx="1">
+            <a:schemeClr val="accent1"/>
+          </a:lnRef>
+          <a:fillRef idx="3">
+            <a:schemeClr val="accent1"/>
+          </a:fillRef>
+          <a:effectRef idx="2">
+            <a:schemeClr val="accent1"/>
+          </a:effectRef>
+          <a:fontRef idx="minor">
+            <a:schemeClr val="lt1"/>
+          </a:fontRef>
+        </p:style>
+        <p:txBody>
+          <a:bodyPr rtlCol="0" anchor="ctr"/>
+          <a:lstStyle/>
+          <a:p>
+            <a:pPr algn="ctr"/>
+          </a:p>
+        </p:txBody>
+      </p:sp>
+      <p:sp>
+        <p:nvSpPr>
+          <p:cNvPr id="38" name="TextBox 37"/>
+          <p:cNvSpPr txBox="1"/>
+          <p:nvPr/>
+        </p:nvSpPr>
+        <p:spPr>
+          <a:xfrm>
+            <a:off x="3639312" y="2880359"/>
+            <a:ext cx="8439912" cy="182880"/>
+          </a:xfrm>
+          <a:prstGeom prst="rect">
+            <a:avLst/>
+          </a:prstGeom>
+          <a:noFill/>
+        </p:spPr>
+        <p:txBody>
+          <a:bodyPr wrap="square">
+            <a:spAutoFit/>
+          </a:bodyPr>
+          <a:lstStyle/>
+          <a:p>
+            <a:pPr algn="l"/>
+            <a:r>
+              <a:rPr sz="800" b="1">
+                <a:solidFill>
+                  <a:srgbClr val="5E7696"/>
+                </a:solidFill>
+                <a:latin typeface="Calibri"/>
+              </a:rPr>
+              <a:t>OPERATIONAL CAPABILITIES</a:t>
+            </a:r>
+          </a:p>
+        </p:txBody>
+      </p:sp>
+      <p:sp>
+        <p:nvSpPr>
+          <p:cNvPr id="39" name="Rectangle 38"/>
+          <p:cNvSpPr/>
+          <p:nvPr/>
+        </p:nvSpPr>
+        <p:spPr>
+          <a:xfrm>
+            <a:off x="3547872" y="3118103"/>
+            <a:ext cx="2746248" cy="1463040"/>
           </a:xfrm>
           <a:prstGeom prst="rect">
             <a:avLst/>
@@ -31303,20 +31942,20 @@
       </p:sp>
       <p:sp>
         <p:nvSpPr>
-          <p:cNvPr id="23" name="Rectangle 22"/>
-          <p:cNvSpPr/>
-          <p:nvPr/>
-        </p:nvSpPr>
-        <p:spPr>
-          <a:xfrm>
-            <a:off x="6099048" y="2450592"/>
-            <a:ext cx="64008" cy="804672"/>
-          </a:xfrm>
-          <a:prstGeom prst="rect">
-            <a:avLst/>
-          </a:prstGeom>
-          <a:solidFill>
-            <a:srgbClr val="0C2340"/>
+          <p:cNvPr id="40" name="Rectangle 39"/>
+          <p:cNvSpPr/>
+          <p:nvPr/>
+        </p:nvSpPr>
+        <p:spPr>
+          <a:xfrm>
+            <a:off x="3547872" y="3118103"/>
+            <a:ext cx="64008" cy="1463040"/>
+          </a:xfrm>
+          <a:prstGeom prst="rect">
+            <a:avLst/>
+          </a:prstGeom>
+          <a:solidFill>
+            <a:srgbClr val="0A8FAE"/>
           </a:solidFill>
           <a:ln>
             <a:noFill/>
@@ -31346,14 +31985,14 @@
       </p:sp>
       <p:sp>
         <p:nvSpPr>
-          <p:cNvPr id="24" name="TextBox 23"/>
-          <p:cNvSpPr txBox="1"/>
-          <p:nvPr/>
-        </p:nvSpPr>
-        <p:spPr>
-          <a:xfrm>
-            <a:off x="6281928" y="2523744"/>
-            <a:ext cx="5257800" cy="274320"/>
+          <p:cNvPr id="41" name="TextBox 40"/>
+          <p:cNvSpPr txBox="1"/>
+          <p:nvPr/>
+        </p:nvSpPr>
+        <p:spPr>
+          <a:xfrm>
+            <a:off x="3730752" y="3246119"/>
+            <a:ext cx="2508504" cy="310896"/>
           </a:xfrm>
           <a:prstGeom prst="rect">
             <a:avLst/>
@@ -31368,27 +32007,27 @@
           <a:p>
             <a:pPr algn="l"/>
             <a:r>
-              <a:rPr sz="1100" b="1">
+              <a:rPr sz="1300" b="1">
                 <a:solidFill>
                   <a:srgbClr val="0C2340"/>
                 </a:solidFill>
-                <a:latin typeface="Calibri"/>
-              </a:rPr>
-              <a:t>Therapist Confirmation Calls</a:t>
-            </a:r>
-          </a:p>
-        </p:txBody>
-      </p:sp>
-      <p:sp>
-        <p:nvSpPr>
-          <p:cNvPr id="25" name="TextBox 24"/>
-          <p:cNvSpPr txBox="1"/>
-          <p:nvPr/>
-        </p:nvSpPr>
-        <p:spPr>
-          <a:xfrm>
-            <a:off x="6281928" y="2852928"/>
-            <a:ext cx="5257800" cy="310896"/>
+                <a:latin typeface="Georgia"/>
+              </a:rPr>
+              <a:t>Automated Patient Reminders</a:t>
+            </a:r>
+          </a:p>
+        </p:txBody>
+      </p:sp>
+      <p:sp>
+        <p:nvSpPr>
+          <p:cNvPr id="42" name="TextBox 41"/>
+          <p:cNvSpPr txBox="1"/>
+          <p:nvPr/>
+        </p:nvSpPr>
+        <p:spPr>
+          <a:xfrm>
+            <a:off x="3730752" y="3648455"/>
+            <a:ext cx="2508504" cy="822960"/>
           </a:xfrm>
           <a:prstGeom prst="rect">
             <a:avLst/>
@@ -31403,27 +32042,28 @@
           <a:p>
             <a:pPr algn="l"/>
             <a:r>
-              <a:rPr sz="1000" b="0">
+              <a:rPr sz="1100" b="0">
                 <a:solidFill>
                   <a:srgbClr val="283C56"/>
                 </a:solidFill>
                 <a:latin typeface="Calibri"/>
               </a:rPr>
-              <a:t>Outbound call to therapist immediately after each new booking. Language auto-detected.</a:t>
-            </a:r>
-          </a:p>
-        </p:txBody>
-      </p:sp>
-      <p:sp>
-        <p:nvSpPr>
-          <p:cNvPr id="26" name="Rectangle 25"/>
-          <p:cNvSpPr/>
-          <p:nvPr/>
-        </p:nvSpPr>
-        <p:spPr>
-          <a:xfrm>
-            <a:off x="457200" y="3346704"/>
-            <a:ext cx="5532120" cy="804672"/>
+              <a:t>Outbound reminder call 2 hours before every appointment.
+Reduces no-shows and improves attendance.</a:t>
+            </a:r>
+          </a:p>
+        </p:txBody>
+      </p:sp>
+      <p:sp>
+        <p:nvSpPr>
+          <p:cNvPr id="43" name="Rectangle 42"/>
+          <p:cNvSpPr/>
+          <p:nvPr/>
+        </p:nvSpPr>
+        <p:spPr>
+          <a:xfrm>
+            <a:off x="6394704" y="3118103"/>
+            <a:ext cx="2746248" cy="1463040"/>
           </a:xfrm>
           <a:prstGeom prst="rect">
             <a:avLst/>
@@ -31461,14 +32101,14 @@
       </p:sp>
       <p:sp>
         <p:nvSpPr>
-          <p:cNvPr id="27" name="Rectangle 26"/>
-          <p:cNvSpPr/>
-          <p:nvPr/>
-        </p:nvSpPr>
-        <p:spPr>
-          <a:xfrm>
-            <a:off x="457200" y="3346704"/>
-            <a:ext cx="64008" cy="804672"/>
+          <p:cNvPr id="44" name="Rectangle 43"/>
+          <p:cNvSpPr/>
+          <p:nvPr/>
+        </p:nvSpPr>
+        <p:spPr>
+          <a:xfrm>
+            <a:off x="6394704" y="3118103"/>
+            <a:ext cx="64008" cy="1463040"/>
           </a:xfrm>
           <a:prstGeom prst="rect">
             <a:avLst/>
@@ -31504,14 +32144,14 @@
       </p:sp>
       <p:sp>
         <p:nvSpPr>
-          <p:cNvPr id="28" name="TextBox 27"/>
-          <p:cNvSpPr txBox="1"/>
-          <p:nvPr/>
-        </p:nvSpPr>
-        <p:spPr>
-          <a:xfrm>
-            <a:off x="640080" y="3419856"/>
-            <a:ext cx="5257800" cy="274320"/>
+          <p:cNvPr id="45" name="TextBox 44"/>
+          <p:cNvSpPr txBox="1"/>
+          <p:nvPr/>
+        </p:nvSpPr>
+        <p:spPr>
+          <a:xfrm>
+            <a:off x="6577584" y="3246119"/>
+            <a:ext cx="2508504" cy="310896"/>
           </a:xfrm>
           <a:prstGeom prst="rect">
             <a:avLst/>
@@ -31526,27 +32166,27 @@
           <a:p>
             <a:pPr algn="l"/>
             <a:r>
-              <a:rPr sz="1100" b="1">
+              <a:rPr sz="1300" b="1">
                 <a:solidFill>
                   <a:srgbClr val="0C2340"/>
                 </a:solidFill>
-                <a:latin typeface="Calibri"/>
-              </a:rPr>
-              <a:t>Voice Campaign Module</a:t>
-            </a:r>
-          </a:p>
-        </p:txBody>
-      </p:sp>
-      <p:sp>
-        <p:nvSpPr>
-          <p:cNvPr id="29" name="TextBox 28"/>
-          <p:cNvSpPr txBox="1"/>
-          <p:nvPr/>
-        </p:nvSpPr>
-        <p:spPr>
-          <a:xfrm>
-            <a:off x="640080" y="3749040"/>
-            <a:ext cx="5257800" cy="310896"/>
+                <a:latin typeface="Georgia"/>
+              </a:rPr>
+              <a:t>Structured Outcome Capture</a:t>
+            </a:r>
+          </a:p>
+        </p:txBody>
+      </p:sp>
+      <p:sp>
+        <p:nvSpPr>
+          <p:cNvPr id="46" name="TextBox 45"/>
+          <p:cNvSpPr txBox="1"/>
+          <p:nvPr/>
+        </p:nvSpPr>
+        <p:spPr>
+          <a:xfrm>
+            <a:off x="6577584" y="3648455"/>
+            <a:ext cx="2508504" cy="822960"/>
           </a:xfrm>
           <a:prstGeom prst="rect">
             <a:avLst/>
@@ -31561,27 +32201,29 @@
           <a:p>
             <a:pPr algn="l"/>
             <a:r>
-              <a:rPr sz="1000" b="0">
+              <a:rPr sz="1100" b="0">
                 <a:solidFill>
                   <a:srgbClr val="283C56"/>
                 </a:solidFill>
                 <a:latin typeface="Calibri"/>
               </a:rPr>
-              <a:t>Health check reminders, promotions &amp; follow-ups with call list and retry logic.</a:t>
-            </a:r>
-          </a:p>
-        </p:txBody>
-      </p:sp>
-      <p:sp>
-        <p:nvSpPr>
-          <p:cNvPr id="30" name="Rectangle 29"/>
-          <p:cNvSpPr/>
-          <p:nvPr/>
-        </p:nvSpPr>
-        <p:spPr>
-          <a:xfrm>
-            <a:off x="6099048" y="3346704"/>
-            <a:ext cx="5532120" cy="804672"/>
+              <a:t>Logs every call result:
+Interested · Not Interested
+Callback Requested · Booking Requested.</a:t>
+            </a:r>
+          </a:p>
+        </p:txBody>
+      </p:sp>
+      <p:sp>
+        <p:nvSpPr>
+          <p:cNvPr id="47" name="Rectangle 46"/>
+          <p:cNvSpPr/>
+          <p:nvPr/>
+        </p:nvSpPr>
+        <p:spPr>
+          <a:xfrm>
+            <a:off x="9241536" y="3118103"/>
+            <a:ext cx="2746248" cy="1463040"/>
           </a:xfrm>
           <a:prstGeom prst="rect">
             <a:avLst/>
@@ -31619,20 +32261,20 @@
       </p:sp>
       <p:sp>
         <p:nvSpPr>
-          <p:cNvPr id="31" name="Rectangle 30"/>
-          <p:cNvSpPr/>
-          <p:nvPr/>
-        </p:nvSpPr>
-        <p:spPr>
-          <a:xfrm>
-            <a:off x="6099048" y="3346704"/>
-            <a:ext cx="64008" cy="804672"/>
-          </a:xfrm>
-          <a:prstGeom prst="rect">
-            <a:avLst/>
-          </a:prstGeom>
-          <a:solidFill>
-            <a:srgbClr val="0C2340"/>
+          <p:cNvPr id="48" name="Rectangle 47"/>
+          <p:cNvSpPr/>
+          <p:nvPr/>
+        </p:nvSpPr>
+        <p:spPr>
+          <a:xfrm>
+            <a:off x="9241536" y="3118103"/>
+            <a:ext cx="64008" cy="1463040"/>
+          </a:xfrm>
+          <a:prstGeom prst="rect">
+            <a:avLst/>
+          </a:prstGeom>
+          <a:solidFill>
+            <a:srgbClr val="B57708"/>
           </a:solidFill>
           <a:ln>
             <a:noFill/>
@@ -31662,14 +32304,14 @@
       </p:sp>
       <p:sp>
         <p:nvSpPr>
-          <p:cNvPr id="32" name="TextBox 31"/>
-          <p:cNvSpPr txBox="1"/>
-          <p:nvPr/>
-        </p:nvSpPr>
-        <p:spPr>
-          <a:xfrm>
-            <a:off x="6281928" y="3419856"/>
-            <a:ext cx="5257800" cy="274320"/>
+          <p:cNvPr id="49" name="TextBox 48"/>
+          <p:cNvSpPr txBox="1"/>
+          <p:nvPr/>
+        </p:nvSpPr>
+        <p:spPr>
+          <a:xfrm>
+            <a:off x="9424416" y="3246119"/>
+            <a:ext cx="2508504" cy="310896"/>
           </a:xfrm>
           <a:prstGeom prst="rect">
             <a:avLst/>
@@ -31684,27 +32326,27 @@
           <a:p>
             <a:pPr algn="l"/>
             <a:r>
-              <a:rPr sz="1100" b="1">
+              <a:rPr sz="1300" b="1">
                 <a:solidFill>
                   <a:srgbClr val="0C2340"/>
                 </a:solidFill>
-                <a:latin typeface="Calibri"/>
-              </a:rPr>
-              <a:t>Structured Outcome Capture</a:t>
-            </a:r>
-          </a:p>
-        </p:txBody>
-      </p:sp>
-      <p:sp>
-        <p:nvSpPr>
-          <p:cNvPr id="33" name="TextBox 32"/>
-          <p:cNvSpPr txBox="1"/>
-          <p:nvPr/>
-        </p:nvSpPr>
-        <p:spPr>
-          <a:xfrm>
-            <a:off x="6281928" y="3749040"/>
-            <a:ext cx="5257800" cy="310896"/>
+                <a:latin typeface="Georgia"/>
+              </a:rPr>
+              <a:t>Natural Arabic Voice</a:t>
+            </a:r>
+          </a:p>
+        </p:txBody>
+      </p:sp>
+      <p:sp>
+        <p:nvSpPr>
+          <p:cNvPr id="50" name="TextBox 49"/>
+          <p:cNvSpPr txBox="1"/>
+          <p:nvPr/>
+        </p:nvSpPr>
+        <p:spPr>
+          <a:xfrm>
+            <a:off x="9424416" y="3648455"/>
+            <a:ext cx="2508504" cy="822960"/>
           </a:xfrm>
           <a:prstGeom prst="rect">
             <a:avLst/>
@@ -31719,27 +32361,106 @@
           <a:p>
             <a:pPr algn="l"/>
             <a:r>
-              <a:rPr sz="1000" b="0">
+              <a:rPr sz="1100" b="0">
                 <a:solidFill>
                   <a:srgbClr val="283C56"/>
                 </a:solidFill>
                 <a:latin typeface="Calibri"/>
               </a:rPr>
-              <a:t>Result per call: interested / not interested / callback requested / booking requested.</a:t>
-            </a:r>
-          </a:p>
-        </p:txBody>
-      </p:sp>
-      <p:sp>
-        <p:nvSpPr>
-          <p:cNvPr id="34" name="Rectangle 33"/>
-          <p:cNvSpPr/>
-          <p:nvPr/>
-        </p:nvSpPr>
-        <p:spPr>
-          <a:xfrm>
-            <a:off x="457200" y="4242816"/>
-            <a:ext cx="5532120" cy="804672"/>
+              <a:t>Premium ElevenLabs Najdi Arabic TTS.
+Natural, warm and locally familiar to every patient.</a:t>
+            </a:r>
+          </a:p>
+        </p:txBody>
+      </p:sp>
+      <p:sp>
+        <p:nvSpPr>
+          <p:cNvPr id="51" name="Rectangle 50"/>
+          <p:cNvSpPr/>
+          <p:nvPr/>
+        </p:nvSpPr>
+        <p:spPr>
+          <a:xfrm>
+            <a:off x="3547872" y="4690871"/>
+            <a:ext cx="36576" cy="182880"/>
+          </a:xfrm>
+          <a:prstGeom prst="rect">
+            <a:avLst/>
+          </a:prstGeom>
+          <a:solidFill>
+            <a:srgbClr val="0A8FAE"/>
+          </a:solidFill>
+          <a:ln>
+            <a:noFill/>
+          </a:ln>
+        </p:spPr>
+        <p:style>
+          <a:lnRef idx="1">
+            <a:schemeClr val="accent1"/>
+          </a:lnRef>
+          <a:fillRef idx="3">
+            <a:schemeClr val="accent1"/>
+          </a:fillRef>
+          <a:effectRef idx="2">
+            <a:schemeClr val="accent1"/>
+          </a:effectRef>
+          <a:fontRef idx="minor">
+            <a:schemeClr val="lt1"/>
+          </a:fontRef>
+        </p:style>
+        <p:txBody>
+          <a:bodyPr rtlCol="0" anchor="ctr"/>
+          <a:lstStyle/>
+          <a:p>
+            <a:pPr algn="ctr"/>
+          </a:p>
+        </p:txBody>
+      </p:sp>
+      <p:sp>
+        <p:nvSpPr>
+          <p:cNvPr id="52" name="TextBox 51"/>
+          <p:cNvSpPr txBox="1"/>
+          <p:nvPr/>
+        </p:nvSpPr>
+        <p:spPr>
+          <a:xfrm>
+            <a:off x="3639312" y="4690871"/>
+            <a:ext cx="8439912" cy="182880"/>
+          </a:xfrm>
+          <a:prstGeom prst="rect">
+            <a:avLst/>
+          </a:prstGeom>
+          <a:noFill/>
+        </p:spPr>
+        <p:txBody>
+          <a:bodyPr wrap="square">
+            <a:spAutoFit/>
+          </a:bodyPr>
+          <a:lstStyle/>
+          <a:p>
+            <a:pPr algn="l"/>
+            <a:r>
+              <a:rPr sz="800" b="1">
+                <a:solidFill>
+                  <a:srgbClr val="5E7696"/>
+                </a:solidFill>
+                <a:latin typeface="Calibri"/>
+              </a:rPr>
+              <a:t>SUPPORTING CAPABILITIES</a:t>
+            </a:r>
+          </a:p>
+        </p:txBody>
+      </p:sp>
+      <p:sp>
+        <p:nvSpPr>
+          <p:cNvPr id="53" name="Rectangle 52"/>
+          <p:cNvSpPr/>
+          <p:nvPr/>
+        </p:nvSpPr>
+        <p:spPr>
+          <a:xfrm>
+            <a:off x="3547872" y="4910327"/>
+            <a:ext cx="4169664" cy="960120"/>
           </a:xfrm>
           <a:prstGeom prst="rect">
             <a:avLst/>
@@ -31777,20 +32498,20 @@
       </p:sp>
       <p:sp>
         <p:nvSpPr>
-          <p:cNvPr id="35" name="Rectangle 34"/>
-          <p:cNvSpPr/>
-          <p:nvPr/>
-        </p:nvSpPr>
-        <p:spPr>
-          <a:xfrm>
-            <a:off x="457200" y="4242816"/>
-            <a:ext cx="64008" cy="804672"/>
-          </a:xfrm>
-          <a:prstGeom prst="rect">
-            <a:avLst/>
-          </a:prstGeom>
-          <a:solidFill>
-            <a:srgbClr val="0C2340"/>
+          <p:cNvPr id="54" name="Rectangle 53"/>
+          <p:cNvSpPr/>
+          <p:nvPr/>
+        </p:nvSpPr>
+        <p:spPr>
+          <a:xfrm>
+            <a:off x="3547872" y="4910327"/>
+            <a:ext cx="64008" cy="960120"/>
+          </a:xfrm>
+          <a:prstGeom prst="rect">
+            <a:avLst/>
+          </a:prstGeom>
+          <a:solidFill>
+            <a:srgbClr val="0A8FAE"/>
           </a:solidFill>
           <a:ln>
             <a:noFill/>
@@ -31820,14 +32541,14 @@
       </p:sp>
       <p:sp>
         <p:nvSpPr>
-          <p:cNvPr id="36" name="TextBox 35"/>
-          <p:cNvSpPr txBox="1"/>
-          <p:nvPr/>
-        </p:nvSpPr>
-        <p:spPr>
-          <a:xfrm>
-            <a:off x="640080" y="4315968"/>
-            <a:ext cx="5257800" cy="274320"/>
+          <p:cNvPr id="55" name="TextBox 54"/>
+          <p:cNvSpPr txBox="1"/>
+          <p:nvPr/>
+        </p:nvSpPr>
+        <p:spPr>
+          <a:xfrm>
+            <a:off x="3730752" y="5001767"/>
+            <a:ext cx="3931920" cy="274320"/>
           </a:xfrm>
           <a:prstGeom prst="rect">
             <a:avLst/>
@@ -31842,11 +32563,11 @@
           <a:p>
             <a:pPr algn="l"/>
             <a:r>
-              <a:rPr sz="1100" b="1">
+              <a:rPr sz="1300" b="1">
                 <a:solidFill>
                   <a:srgbClr val="0C2340"/>
                 </a:solidFill>
-                <a:latin typeface="Calibri"/>
+                <a:latin typeface="Georgia"/>
               </a:rPr>
               <a:t>STC SIP Trunk Integration</a:t>
             </a:r>
@@ -31855,14 +32576,14 @@
       </p:sp>
       <p:sp>
         <p:nvSpPr>
-          <p:cNvPr id="37" name="TextBox 36"/>
-          <p:cNvSpPr txBox="1"/>
-          <p:nvPr/>
-        </p:nvSpPr>
-        <p:spPr>
-          <a:xfrm>
-            <a:off x="640080" y="4645152"/>
-            <a:ext cx="5257800" cy="310896"/>
+          <p:cNvPr id="56" name="TextBox 55"/>
+          <p:cNvSpPr txBox="1"/>
+          <p:nvPr/>
+        </p:nvSpPr>
+        <p:spPr>
+          <a:xfrm>
+            <a:off x="3730752" y="5349239"/>
+            <a:ext cx="3931920" cy="420624"/>
           </a:xfrm>
           <a:prstGeom prst="rect">
             <a:avLst/>
@@ -31877,27 +32598,27 @@
           <a:p>
             <a:pPr algn="l"/>
             <a:r>
-              <a:rPr sz="1000" b="0">
+              <a:rPr sz="1100" b="0">
                 <a:solidFill>
                   <a:srgbClr val="283C56"/>
                 </a:solidFill>
                 <a:latin typeface="Calibri"/>
               </a:rPr>
-              <a:t>Uses Vitality's existing STC infrastructure. 1 AIKA voice DID included.</a:t>
-            </a:r>
-          </a:p>
-        </p:txBody>
-      </p:sp>
-      <p:sp>
-        <p:nvSpPr>
-          <p:cNvPr id="38" name="Rectangle 37"/>
-          <p:cNvSpPr/>
-          <p:nvPr/>
-        </p:nvSpPr>
-        <p:spPr>
-          <a:xfrm>
-            <a:off x="6099048" y="4242816"/>
-            <a:ext cx="5532120" cy="804672"/>
+              <a:t>Uses Vitality's existing STC infrastructure. 1 dedicated AIKA voice DID included in the platform fee.</a:t>
+            </a:r>
+          </a:p>
+        </p:txBody>
+      </p:sp>
+      <p:sp>
+        <p:nvSpPr>
+          <p:cNvPr id="57" name="Rectangle 56"/>
+          <p:cNvSpPr/>
+          <p:nvPr/>
+        </p:nvSpPr>
+        <p:spPr>
+          <a:xfrm>
+            <a:off x="7818120" y="4910327"/>
+            <a:ext cx="4169664" cy="960120"/>
           </a:xfrm>
           <a:prstGeom prst="rect">
             <a:avLst/>
@@ -31935,14 +32656,14 @@
       </p:sp>
       <p:sp>
         <p:nvSpPr>
-          <p:cNvPr id="39" name="Rectangle 38"/>
-          <p:cNvSpPr/>
-          <p:nvPr/>
-        </p:nvSpPr>
-        <p:spPr>
-          <a:xfrm>
-            <a:off x="6099048" y="4242816"/>
-            <a:ext cx="64008" cy="804672"/>
+          <p:cNvPr id="58" name="Rectangle 57"/>
+          <p:cNvSpPr/>
+          <p:nvPr/>
+        </p:nvSpPr>
+        <p:spPr>
+          <a:xfrm>
+            <a:off x="7818120" y="4910327"/>
+            <a:ext cx="64008" cy="960120"/>
           </a:xfrm>
           <a:prstGeom prst="rect">
             <a:avLst/>
@@ -31978,14 +32699,14 @@
       </p:sp>
       <p:sp>
         <p:nvSpPr>
-          <p:cNvPr id="40" name="TextBox 39"/>
-          <p:cNvSpPr txBox="1"/>
-          <p:nvPr/>
-        </p:nvSpPr>
-        <p:spPr>
-          <a:xfrm>
-            <a:off x="6281928" y="4315968"/>
-            <a:ext cx="5257800" cy="274320"/>
+          <p:cNvPr id="59" name="TextBox 58"/>
+          <p:cNvSpPr txBox="1"/>
+          <p:nvPr/>
+        </p:nvSpPr>
+        <p:spPr>
+          <a:xfrm>
+            <a:off x="8001000" y="5001767"/>
+            <a:ext cx="3931920" cy="274320"/>
           </a:xfrm>
           <a:prstGeom prst="rect">
             <a:avLst/>
@@ -32000,27 +32721,27 @@
           <a:p>
             <a:pPr algn="l"/>
             <a:r>
-              <a:rPr sz="1100" b="1">
+              <a:rPr sz="1300" b="1">
                 <a:solidFill>
                   <a:srgbClr val="0C2340"/>
                 </a:solidFill>
-                <a:latin typeface="Calibri"/>
-              </a:rPr>
-              <a:t>Natural Arabic Voice</a:t>
-            </a:r>
-          </a:p>
-        </p:txBody>
-      </p:sp>
-      <p:sp>
-        <p:nvSpPr>
-          <p:cNvPr id="41" name="TextBox 40"/>
-          <p:cNvSpPr txBox="1"/>
-          <p:nvPr/>
-        </p:nvSpPr>
-        <p:spPr>
-          <a:xfrm>
-            <a:off x="6281928" y="4645152"/>
-            <a:ext cx="5257800" cy="310896"/>
+                <a:latin typeface="Georgia"/>
+              </a:rPr>
+              <a:t>Voice Campaign Module</a:t>
+            </a:r>
+          </a:p>
+        </p:txBody>
+      </p:sp>
+      <p:sp>
+        <p:nvSpPr>
+          <p:cNvPr id="60" name="TextBox 59"/>
+          <p:cNvSpPr txBox="1"/>
+          <p:nvPr/>
+        </p:nvSpPr>
+        <p:spPr>
+          <a:xfrm>
+            <a:off x="8001000" y="5349239"/>
+            <a:ext cx="3931920" cy="420624"/>
           </a:xfrm>
           <a:prstGeom prst="rect">
             <a:avLst/>
@@ -32035,27 +32756,27 @@
           <a:p>
             <a:pPr algn="l"/>
             <a:r>
-              <a:rPr sz="1000" b="0">
+              <a:rPr sz="1100" b="0">
                 <a:solidFill>
                   <a:srgbClr val="283C56"/>
                 </a:solidFill>
                 <a:latin typeface="Calibri"/>
               </a:rPr>
-              <a:t>Premium Najdi Arabic TTS via ElevenLabs — warm, natural voice that feels local.</a:t>
-            </a:r>
-          </a:p>
-        </p:txBody>
-      </p:sp>
-      <p:sp>
-        <p:nvSpPr>
-          <p:cNvPr id="42" name="Rectangle 41"/>
-          <p:cNvSpPr/>
-          <p:nvPr/>
-        </p:nvSpPr>
-        <p:spPr>
-          <a:xfrm>
-            <a:off x="457200" y="5047488"/>
-            <a:ext cx="11274552" cy="384048"/>
+              <a:t>Outbound health check reminders, seasonal promotions and patient re-engagement campaigns with retry logic.</a:t>
+            </a:r>
+          </a:p>
+        </p:txBody>
+      </p:sp>
+      <p:sp>
+        <p:nvSpPr>
+          <p:cNvPr id="61" name="Rectangle 60"/>
+          <p:cNvSpPr/>
+          <p:nvPr/>
+        </p:nvSpPr>
+        <p:spPr>
+          <a:xfrm>
+            <a:off x="3547872" y="5998463"/>
+            <a:ext cx="8439912" cy="438912"/>
           </a:xfrm>
           <a:prstGeom prst="rect">
             <a:avLst/>
@@ -32093,14 +32814,57 @@
       </p:sp>
       <p:sp>
         <p:nvSpPr>
-          <p:cNvPr id="43" name="TextBox 42"/>
-          <p:cNvSpPr txBox="1"/>
-          <p:nvPr/>
-        </p:nvSpPr>
-        <p:spPr>
-          <a:xfrm>
-            <a:off x="640080" y="5102352"/>
-            <a:ext cx="10972800" cy="274320"/>
+          <p:cNvPr id="62" name="Rectangle 61"/>
+          <p:cNvSpPr/>
+          <p:nvPr/>
+        </p:nvSpPr>
+        <p:spPr>
+          <a:xfrm>
+            <a:off x="3547872" y="5998463"/>
+            <a:ext cx="64008" cy="438912"/>
+          </a:xfrm>
+          <a:prstGeom prst="rect">
+            <a:avLst/>
+          </a:prstGeom>
+          <a:solidFill>
+            <a:srgbClr val="0A8FAE"/>
+          </a:solidFill>
+          <a:ln>
+            <a:noFill/>
+          </a:ln>
+        </p:spPr>
+        <p:style>
+          <a:lnRef idx="1">
+            <a:schemeClr val="accent1"/>
+          </a:lnRef>
+          <a:fillRef idx="3">
+            <a:schemeClr val="accent1"/>
+          </a:fillRef>
+          <a:effectRef idx="2">
+            <a:schemeClr val="accent1"/>
+          </a:effectRef>
+          <a:fontRef idx="minor">
+            <a:schemeClr val="lt1"/>
+          </a:fontRef>
+        </p:style>
+        <p:txBody>
+          <a:bodyPr rtlCol="0" anchor="ctr"/>
+          <a:lstStyle/>
+          <a:p>
+            <a:pPr algn="ctr"/>
+          </a:p>
+        </p:txBody>
+      </p:sp>
+      <p:sp>
+        <p:nvSpPr>
+          <p:cNvPr id="63" name="TextBox 62"/>
+          <p:cNvSpPr txBox="1"/>
+          <p:nvPr/>
+        </p:nvSpPr>
+        <p:spPr>
+          <a:xfrm>
+            <a:off x="3712464" y="6089903"/>
+            <a:ext cx="8183880" cy="274320"/>
           </a:xfrm>
           <a:prstGeom prst="rect">
             <a:avLst/>
@@ -32115,13 +32879,13 @@
           <a:p>
             <a:pPr algn="l"/>
             <a:r>
-              <a:rPr sz="950" b="1">
+              <a:rPr sz="1000" b="0">
                 <a:solidFill>
                   <a:srgbClr val="076E86"/>
                 </a:solidFill>
                 <a:latin typeface="Calibri"/>
               </a:rPr>
-              <a:t>15,000 voice minutes/year included  ·  Powered by Vapi + OpenAI/Gemini + ElevenLabs TTS  ·  Saudi-region cloud (AWS Bahrain / KSA)</a:t>
+              <a:t>Implementation Note:  1 dedicated AIKA voice DID is recommended for cleaner call routing and a consistent patient experience.</a:t>
             </a:r>
           </a:p>
         </p:txBody>
